--- a/Lecture_1/Python_Introduction.pptx
+++ b/Lecture_1/Python_Introduction.pptx
@@ -1021,7 +1021,7 @@
           <a:p>
             <a:fld id="{A7B39255-9F59-4CB1-AD21-993566954BFE}" type="datetimeFigureOut">
               <a:rPr lang="en-US" smtClean="0"/>
-              <a:t>9/30/2026</a:t>
+              <a:t>10/1/2026</a:t>
             </a:fld>
             <a:endParaRPr lang="en-US"/>
           </a:p>
@@ -3966,7 +3966,7 @@
           <a:p>
             <a:fld id="{F94F2C90-A174-4428-BEA0-8C2E8F6C5F79}" type="datetimeFigureOut">
               <a:rPr lang="it-IT" smtClean="0"/>
-              <a:t>30/09/2026</a:t>
+              <a:t>01/10/2026</a:t>
             </a:fld>
             <a:endParaRPr lang="it-IT"/>
           </a:p>
@@ -4166,7 +4166,7 @@
           <a:p>
             <a:fld id="{F94F2C90-A174-4428-BEA0-8C2E8F6C5F79}" type="datetimeFigureOut">
               <a:rPr lang="it-IT" smtClean="0"/>
-              <a:t>30/09/2026</a:t>
+              <a:t>01/10/2026</a:t>
             </a:fld>
             <a:endParaRPr lang="it-IT"/>
           </a:p>
@@ -4376,7 +4376,7 @@
           <a:p>
             <a:fld id="{F94F2C90-A174-4428-BEA0-8C2E8F6C5F79}" type="datetimeFigureOut">
               <a:rPr lang="it-IT" smtClean="0"/>
-              <a:t>30/09/2026</a:t>
+              <a:t>01/10/2026</a:t>
             </a:fld>
             <a:endParaRPr lang="it-IT"/>
           </a:p>
@@ -4576,7 +4576,7 @@
           <a:p>
             <a:fld id="{F94F2C90-A174-4428-BEA0-8C2E8F6C5F79}" type="datetimeFigureOut">
               <a:rPr lang="it-IT" smtClean="0"/>
-              <a:t>30/09/2026</a:t>
+              <a:t>01/10/2026</a:t>
             </a:fld>
             <a:endParaRPr lang="it-IT"/>
           </a:p>
@@ -4852,7 +4852,7 @@
           <a:p>
             <a:fld id="{F94F2C90-A174-4428-BEA0-8C2E8F6C5F79}" type="datetimeFigureOut">
               <a:rPr lang="it-IT" smtClean="0"/>
-              <a:t>30/09/2026</a:t>
+              <a:t>01/10/2026</a:t>
             </a:fld>
             <a:endParaRPr lang="it-IT"/>
           </a:p>
@@ -5120,7 +5120,7 @@
           <a:p>
             <a:fld id="{F94F2C90-A174-4428-BEA0-8C2E8F6C5F79}" type="datetimeFigureOut">
               <a:rPr lang="it-IT" smtClean="0"/>
-              <a:t>30/09/2026</a:t>
+              <a:t>01/10/2026</a:t>
             </a:fld>
             <a:endParaRPr lang="it-IT"/>
           </a:p>
@@ -5535,7 +5535,7 @@
           <a:p>
             <a:fld id="{F94F2C90-A174-4428-BEA0-8C2E8F6C5F79}" type="datetimeFigureOut">
               <a:rPr lang="it-IT" smtClean="0"/>
-              <a:t>30/09/2026</a:t>
+              <a:t>01/10/2026</a:t>
             </a:fld>
             <a:endParaRPr lang="it-IT"/>
           </a:p>
@@ -5677,7 +5677,7 @@
           <a:p>
             <a:fld id="{F94F2C90-A174-4428-BEA0-8C2E8F6C5F79}" type="datetimeFigureOut">
               <a:rPr lang="it-IT" smtClean="0"/>
-              <a:t>30/09/2026</a:t>
+              <a:t>01/10/2026</a:t>
             </a:fld>
             <a:endParaRPr lang="it-IT"/>
           </a:p>
@@ -5790,7 +5790,7 @@
           <a:p>
             <a:fld id="{F94F2C90-A174-4428-BEA0-8C2E8F6C5F79}" type="datetimeFigureOut">
               <a:rPr lang="it-IT" smtClean="0"/>
-              <a:t>30/09/2026</a:t>
+              <a:t>01/10/2026</a:t>
             </a:fld>
             <a:endParaRPr lang="it-IT"/>
           </a:p>
@@ -6103,7 +6103,7 @@
           <a:p>
             <a:fld id="{F94F2C90-A174-4428-BEA0-8C2E8F6C5F79}" type="datetimeFigureOut">
               <a:rPr lang="it-IT" smtClean="0"/>
-              <a:t>30/09/2026</a:t>
+              <a:t>01/10/2026</a:t>
             </a:fld>
             <a:endParaRPr lang="it-IT"/>
           </a:p>
@@ -6392,7 +6392,7 @@
           <a:p>
             <a:fld id="{F94F2C90-A174-4428-BEA0-8C2E8F6C5F79}" type="datetimeFigureOut">
               <a:rPr lang="it-IT" smtClean="0"/>
-              <a:t>30/09/2026</a:t>
+              <a:t>01/10/2026</a:t>
             </a:fld>
             <a:endParaRPr lang="it-IT"/>
           </a:p>
@@ -6635,7 +6635,7 @@
           <a:p>
             <a:fld id="{F94F2C90-A174-4428-BEA0-8C2E8F6C5F79}" type="datetimeFigureOut">
               <a:rPr lang="it-IT" smtClean="0"/>
-              <a:t>30/09/2026</a:t>
+              <a:t>01/10/2026</a:t>
             </a:fld>
             <a:endParaRPr lang="it-IT"/>
           </a:p>
@@ -38201,7 +38201,25 @@
                 </a:solidFill>
                 <a:latin typeface="+mn-lt"/>
               </a:rPr>
-              <a:t>Today’s plan (1 h 45)</a:t>
+              <a:t>Today’s plan (1 h </a:t>
+            </a:r>
+            <a:r>
+              <a:rPr lang="en-US" sz="4000" b="1">
+                <a:solidFill>
+                  <a:srgbClr val="000000"/>
+                </a:solidFill>
+                <a:latin typeface="+mn-lt"/>
+              </a:rPr>
+              <a:t>30</a:t>
+            </a:r>
+            <a:r>
+              <a:rPr sz="4000" b="1">
+                <a:solidFill>
+                  <a:srgbClr val="000000"/>
+                </a:solidFill>
+                <a:latin typeface="+mn-lt"/>
+              </a:rPr>
+              <a:t>)</a:t>
             </a:r>
           </a:p>
         </p:txBody>

--- a/Lecture_1/Python_Introduction.pptx
+++ b/Lecture_1/Python_Introduction.pptx
@@ -159,7 +159,7 @@
 <file path=ppt/revisionInfo.xml><?xml version="1.0" encoding="utf-8"?>
 <p1510:revInfo xmlns:a="http://schemas.openxmlformats.org/drawingml/2006/main" xmlns:r="http://schemas.openxmlformats.org/officeDocument/2006/relationships" xmlns:p1510="http://schemas.microsoft.com/office/powerpoint/2015/10/main">
   <p1510:revLst>
-    <p1510:client id="{F9490AA6-74E3-4F4F-B030-D4EBB6346BF6}" v="9" dt="2026-09-30T08:56:24.666"/>
+    <p1510:client id="{F9490AA6-74E3-4F4F-B030-D4EBB6346BF6}" v="25" dt="2026-10-02T10:48:54.787"/>
   </p1510:revLst>
 </p1510:revInfo>
 </file>
@@ -168,8 +168,8 @@
 <pc:chgInfo xmlns:a="http://schemas.openxmlformats.org/drawingml/2006/main" xmlns:r="http://schemas.openxmlformats.org/officeDocument/2006/relationships" xmlns:ac="http://schemas.microsoft.com/office/drawing/2013/main/command" xmlns:pc="http://schemas.microsoft.com/office/powerpoint/2013/main/command">
   <pc:docChgLst>
     <pc:chgData name="Boi, Matteo (DSL)" userId="82f0ed66-5171-4b7b-a4b0-05ee01bcdb77" providerId="ADAL" clId="{84FD0EBE-142F-49EE-BACE-6F78937E4B40}"/>
-    <pc:docChg chg="custSel addSld delSld modSld">
-      <pc:chgData name="Boi, Matteo (DSL)" userId="82f0ed66-5171-4b7b-a4b0-05ee01bcdb77" providerId="ADAL" clId="{84FD0EBE-142F-49EE-BACE-6F78937E4B40}" dt="2026-09-30T09:49:36.977" v="257" actId="20577"/>
+    <pc:docChg chg="undo custSel addSld delSld modSld">
+      <pc:chgData name="Boi, Matteo (DSL)" userId="82f0ed66-5171-4b7b-a4b0-05ee01bcdb77" providerId="ADAL" clId="{84FD0EBE-142F-49EE-BACE-6F78937E4B40}" dt="2026-10-02T10:51:45.598" v="298" actId="1036"/>
       <pc:docMkLst>
         <pc:docMk/>
       </pc:docMkLst>
@@ -204,15 +204,23 @@
           </ac:spMkLst>
         </pc:spChg>
       </pc:sldChg>
-      <pc:sldChg chg="modAnim modNotesTx">
-        <pc:chgData name="Boi, Matteo (DSL)" userId="82f0ed66-5171-4b7b-a4b0-05ee01bcdb77" providerId="ADAL" clId="{84FD0EBE-142F-49EE-BACE-6F78937E4B40}" dt="2026-09-30T09:48:01.671" v="223" actId="20577"/>
+      <pc:sldChg chg="modSp modAnim modNotesTx">
+        <pc:chgData name="Boi, Matteo (DSL)" userId="82f0ed66-5171-4b7b-a4b0-05ee01bcdb77" providerId="ADAL" clId="{84FD0EBE-142F-49EE-BACE-6F78937E4B40}" dt="2026-10-02T10:48:12.021" v="268" actId="20577"/>
         <pc:sldMkLst>
           <pc:docMk/>
           <pc:sldMk cId="0" sldId="257"/>
         </pc:sldMkLst>
+        <pc:spChg chg="mod">
+          <ac:chgData name="Boi, Matteo (DSL)" userId="82f0ed66-5171-4b7b-a4b0-05ee01bcdb77" providerId="ADAL" clId="{84FD0EBE-142F-49EE-BACE-6F78937E4B40}" dt="2026-10-02T10:48:12.021" v="268" actId="20577"/>
+          <ac:spMkLst>
+            <pc:docMk/>
+            <pc:sldMk cId="0" sldId="257"/>
+            <ac:spMk id="23" creationId="{00000000-0000-0000-0000-000000000000}"/>
+          </ac:spMkLst>
+        </pc:spChg>
       </pc:sldChg>
-      <pc:sldChg chg="addSp delSp modSp mod modNotesTx">
-        <pc:chgData name="Boi, Matteo (DSL)" userId="82f0ed66-5171-4b7b-a4b0-05ee01bcdb77" providerId="ADAL" clId="{84FD0EBE-142F-49EE-BACE-6F78937E4B40}" dt="2026-09-30T09:48:08.897" v="225" actId="20577"/>
+      <pc:sldChg chg="addSp delSp modSp mod modAnim modNotesTx">
+        <pc:chgData name="Boi, Matteo (DSL)" userId="82f0ed66-5171-4b7b-a4b0-05ee01bcdb77" providerId="ADAL" clId="{84FD0EBE-142F-49EE-BACE-6F78937E4B40}" dt="2026-10-02T10:48:54.787" v="273"/>
         <pc:sldMkLst>
           <pc:docMk/>
           <pc:sldMk cId="0" sldId="258"/>
@@ -305,28 +313,12 @@
             <ac:spMk id="19" creationId="{00000000-0000-0000-0000-000000000000}"/>
           </ac:spMkLst>
         </pc:spChg>
-        <pc:spChg chg="add del mod">
-          <ac:chgData name="Boi, Matteo (DSL)" userId="82f0ed66-5171-4b7b-a4b0-05ee01bcdb77" providerId="ADAL" clId="{84FD0EBE-142F-49EE-BACE-6F78937E4B40}" dt="2026-09-30T08:47:33.323" v="73" actId="21"/>
-          <ac:spMkLst>
-            <pc:docMk/>
-            <pc:sldMk cId="0" sldId="258"/>
-            <ac:spMk id="20" creationId="{0CA3F335-C748-D1C7-A028-D7AD9915D20F}"/>
-          </ac:spMkLst>
-        </pc:spChg>
         <pc:spChg chg="mod">
           <ac:chgData name="Boi, Matteo (DSL)" userId="82f0ed66-5171-4b7b-a4b0-05ee01bcdb77" providerId="ADAL" clId="{84FD0EBE-142F-49EE-BACE-6F78937E4B40}" dt="2026-09-30T09:08:16.184" v="131" actId="1036"/>
           <ac:spMkLst>
             <pc:docMk/>
             <pc:sldMk cId="0" sldId="258"/>
             <ac:spMk id="21" creationId="{00000000-0000-0000-0000-000000000000}"/>
-          </ac:spMkLst>
-        </pc:spChg>
-        <pc:spChg chg="add">
-          <ac:chgData name="Boi, Matteo (DSL)" userId="82f0ed66-5171-4b7b-a4b0-05ee01bcdb77" providerId="ADAL" clId="{84FD0EBE-142F-49EE-BACE-6F78937E4B40}" dt="2026-09-30T08:47:34.866" v="75" actId="22"/>
-          <ac:spMkLst>
-            <pc:docMk/>
-            <pc:sldMk cId="0" sldId="258"/>
-            <ac:spMk id="22" creationId="{9825AF98-6AC9-88A7-4E85-8F664B1A2D44}"/>
           </ac:spMkLst>
         </pc:spChg>
         <pc:spChg chg="mod">
@@ -385,14 +377,6 @@
             <ac:picMk id="15" creationId="{00000000-0000-0000-0000-000000000000}"/>
           </ac:picMkLst>
         </pc:picChg>
-        <pc:picChg chg="add mod">
-          <ac:chgData name="Boi, Matteo (DSL)" userId="82f0ed66-5171-4b7b-a4b0-05ee01bcdb77" providerId="ADAL" clId="{84FD0EBE-142F-49EE-BACE-6F78937E4B40}" dt="2026-09-30T08:57:44.665" v="122" actId="14100"/>
-          <ac:picMkLst>
-            <pc:docMk/>
-            <pc:sldMk cId="0" sldId="258"/>
-            <ac:picMk id="24" creationId="{114A0AE3-D1CE-32CA-5355-29FD981E82AB}"/>
-          </ac:picMkLst>
-        </pc:picChg>
         <pc:cxnChg chg="ord">
           <ac:chgData name="Boi, Matteo (DSL)" userId="82f0ed66-5171-4b7b-a4b0-05ee01bcdb77" providerId="ADAL" clId="{84FD0EBE-142F-49EE-BACE-6F78937E4B40}" dt="2026-09-30T08:57:48.867" v="123" actId="166"/>
           <ac:cxnSpMkLst>
@@ -403,97 +387,129 @@
         </pc:cxnChg>
       </pc:sldChg>
       <pc:sldChg chg="delSp modSp mod modNotesTx">
-        <pc:chgData name="Boi, Matteo (DSL)" userId="82f0ed66-5171-4b7b-a4b0-05ee01bcdb77" providerId="ADAL" clId="{84FD0EBE-142F-49EE-BACE-6F78937E4B40}" dt="2026-09-30T09:48:12.283" v="226" actId="20577"/>
+        <pc:chgData name="Boi, Matteo (DSL)" userId="82f0ed66-5171-4b7b-a4b0-05ee01bcdb77" providerId="ADAL" clId="{84FD0EBE-142F-49EE-BACE-6F78937E4B40}" dt="2026-10-02T10:51:45.598" v="298" actId="1036"/>
         <pc:sldMkLst>
           <pc:docMk/>
           <pc:sldMk cId="0" sldId="259"/>
         </pc:sldMkLst>
         <pc:spChg chg="mod">
-          <ac:chgData name="Boi, Matteo (DSL)" userId="82f0ed66-5171-4b7b-a4b0-05ee01bcdb77" providerId="ADAL" clId="{84FD0EBE-142F-49EE-BACE-6F78937E4B40}" dt="2026-09-30T09:14:19.209" v="162" actId="20577"/>
+          <ac:chgData name="Boi, Matteo (DSL)" userId="82f0ed66-5171-4b7b-a4b0-05ee01bcdb77" providerId="ADAL" clId="{84FD0EBE-142F-49EE-BACE-6F78937E4B40}" dt="2026-10-02T10:51:45.598" v="298" actId="1036"/>
           <ac:spMkLst>
             <pc:docMk/>
             <pc:sldMk cId="0" sldId="259"/>
             <ac:spMk id="8" creationId="{00000000-0000-0000-0000-000000000000}"/>
           </ac:spMkLst>
         </pc:spChg>
-        <pc:spChg chg="del">
-          <ac:chgData name="Boi, Matteo (DSL)" userId="82f0ed66-5171-4b7b-a4b0-05ee01bcdb77" providerId="ADAL" clId="{84FD0EBE-142F-49EE-BACE-6F78937E4B40}" dt="2026-09-29T13:55:55.377" v="52" actId="478"/>
+        <pc:spChg chg="mod">
+          <ac:chgData name="Boi, Matteo (DSL)" userId="82f0ed66-5171-4b7b-a4b0-05ee01bcdb77" providerId="ADAL" clId="{84FD0EBE-142F-49EE-BACE-6F78937E4B40}" dt="2026-10-02T10:51:45.598" v="298" actId="1036"/>
           <ac:spMkLst>
             <pc:docMk/>
             <pc:sldMk cId="0" sldId="259"/>
-            <ac:spMk id="9" creationId="{00000000-0000-0000-0000-000000000000}"/>
+            <ac:spMk id="10" creationId="{00000000-0000-0000-0000-000000000000}"/>
+          </ac:spMkLst>
+        </pc:spChg>
+        <pc:spChg chg="mod">
+          <ac:chgData name="Boi, Matteo (DSL)" userId="82f0ed66-5171-4b7b-a4b0-05ee01bcdb77" providerId="ADAL" clId="{84FD0EBE-142F-49EE-BACE-6F78937E4B40}" dt="2026-10-02T10:51:45.598" v="298" actId="1036"/>
+          <ac:spMkLst>
+            <pc:docMk/>
+            <pc:sldMk cId="0" sldId="259"/>
+            <ac:spMk id="13" creationId="{00000000-0000-0000-0000-000000000000}"/>
           </ac:spMkLst>
         </pc:spChg>
         <pc:spChg chg="del">
-          <ac:chgData name="Boi, Matteo (DSL)" userId="82f0ed66-5171-4b7b-a4b0-05ee01bcdb77" providerId="ADAL" clId="{84FD0EBE-142F-49EE-BACE-6F78937E4B40}" dt="2026-09-29T13:55:55.377" v="52" actId="478"/>
+          <ac:chgData name="Boi, Matteo (DSL)" userId="82f0ed66-5171-4b7b-a4b0-05ee01bcdb77" providerId="ADAL" clId="{84FD0EBE-142F-49EE-BACE-6F78937E4B40}" dt="2026-10-02T10:51:04.418" v="274" actId="478"/>
           <ac:spMkLst>
             <pc:docMk/>
             <pc:sldMk cId="0" sldId="259"/>
-            <ac:spMk id="12" creationId="{00000000-0000-0000-0000-000000000000}"/>
+            <ac:spMk id="16" creationId="{00000000-0000-0000-0000-000000000000}"/>
           </ac:spMkLst>
         </pc:spChg>
         <pc:spChg chg="del">
-          <ac:chgData name="Boi, Matteo (DSL)" userId="82f0ed66-5171-4b7b-a4b0-05ee01bcdb77" providerId="ADAL" clId="{84FD0EBE-142F-49EE-BACE-6F78937E4B40}" dt="2026-09-29T13:55:55.377" v="52" actId="478"/>
+          <ac:chgData name="Boi, Matteo (DSL)" userId="82f0ed66-5171-4b7b-a4b0-05ee01bcdb77" providerId="ADAL" clId="{84FD0EBE-142F-49EE-BACE-6F78937E4B40}" dt="2026-10-02T10:51:04.418" v="274" actId="478"/>
           <ac:spMkLst>
             <pc:docMk/>
             <pc:sldMk cId="0" sldId="259"/>
-            <ac:spMk id="15" creationId="{00000000-0000-0000-0000-000000000000}"/>
+            <ac:spMk id="18" creationId="{00000000-0000-0000-0000-000000000000}"/>
           </ac:spMkLst>
         </pc:spChg>
-        <pc:spChg chg="del">
-          <ac:chgData name="Boi, Matteo (DSL)" userId="82f0ed66-5171-4b7b-a4b0-05ee01bcdb77" providerId="ADAL" clId="{84FD0EBE-142F-49EE-BACE-6F78937E4B40}" dt="2026-09-29T13:55:55.377" v="52" actId="478"/>
+        <pc:spChg chg="mod">
+          <ac:chgData name="Boi, Matteo (DSL)" userId="82f0ed66-5171-4b7b-a4b0-05ee01bcdb77" providerId="ADAL" clId="{84FD0EBE-142F-49EE-BACE-6F78937E4B40}" dt="2026-10-02T10:51:45.598" v="298" actId="1036"/>
           <ac:spMkLst>
             <pc:docMk/>
             <pc:sldMk cId="0" sldId="259"/>
-            <ac:spMk id="19" creationId="{00000000-0000-0000-0000-000000000000}"/>
+            <ac:spMk id="20" creationId="{00000000-0000-0000-0000-000000000000}"/>
           </ac:spMkLst>
         </pc:spChg>
-        <pc:spChg chg="del">
-          <ac:chgData name="Boi, Matteo (DSL)" userId="82f0ed66-5171-4b7b-a4b0-05ee01bcdb77" providerId="ADAL" clId="{84FD0EBE-142F-49EE-BACE-6F78937E4B40}" dt="2026-09-29T13:55:55.377" v="52" actId="478"/>
+        <pc:spChg chg="mod">
+          <ac:chgData name="Boi, Matteo (DSL)" userId="82f0ed66-5171-4b7b-a4b0-05ee01bcdb77" providerId="ADAL" clId="{84FD0EBE-142F-49EE-BACE-6F78937E4B40}" dt="2026-10-02T10:51:45.598" v="298" actId="1036"/>
           <ac:spMkLst>
             <pc:docMk/>
             <pc:sldMk cId="0" sldId="259"/>
-            <ac:spMk id="22" creationId="{00000000-0000-0000-0000-000000000000}"/>
+            <ac:spMk id="21" creationId="{00000000-0000-0000-0000-000000000000}"/>
           </ac:spMkLst>
         </pc:spChg>
-        <pc:spChg chg="del">
-          <ac:chgData name="Boi, Matteo (DSL)" userId="82f0ed66-5171-4b7b-a4b0-05ee01bcdb77" providerId="ADAL" clId="{84FD0EBE-142F-49EE-BACE-6F78937E4B40}" dt="2026-09-29T13:55:55.377" v="52" actId="478"/>
+        <pc:spChg chg="mod">
+          <ac:chgData name="Boi, Matteo (DSL)" userId="82f0ed66-5171-4b7b-a4b0-05ee01bcdb77" providerId="ADAL" clId="{84FD0EBE-142F-49EE-BACE-6F78937E4B40}" dt="2026-10-02T10:51:35.630" v="279" actId="1076"/>
           <ac:spMkLst>
             <pc:docMk/>
             <pc:sldMk cId="0" sldId="259"/>
-            <ac:spMk id="25" creationId="{00000000-0000-0000-0000-000000000000}"/>
+            <ac:spMk id="23" creationId="{00000000-0000-0000-0000-000000000000}"/>
           </ac:spMkLst>
         </pc:spChg>
-        <pc:spChg chg="del">
-          <ac:chgData name="Boi, Matteo (DSL)" userId="82f0ed66-5171-4b7b-a4b0-05ee01bcdb77" providerId="ADAL" clId="{84FD0EBE-142F-49EE-BACE-6F78937E4B40}" dt="2026-09-29T13:55:55.377" v="52" actId="478"/>
+        <pc:spChg chg="mod">
+          <ac:chgData name="Boi, Matteo (DSL)" userId="82f0ed66-5171-4b7b-a4b0-05ee01bcdb77" providerId="ADAL" clId="{84FD0EBE-142F-49EE-BACE-6F78937E4B40}" dt="2026-10-02T10:51:45.598" v="298" actId="1036"/>
           <ac:spMkLst>
             <pc:docMk/>
             <pc:sldMk cId="0" sldId="259"/>
-            <ac:spMk id="28" creationId="{00000000-0000-0000-0000-000000000000}"/>
+            <ac:spMk id="24" creationId="{00000000-0000-0000-0000-000000000000}"/>
           </ac:spMkLst>
         </pc:spChg>
         <pc:spChg chg="mod">
-          <ac:chgData name="Boi, Matteo (DSL)" userId="82f0ed66-5171-4b7b-a4b0-05ee01bcdb77" providerId="ADAL" clId="{84FD0EBE-142F-49EE-BACE-6F78937E4B40}" dt="2026-09-30T09:14:01.066" v="150" actId="6549"/>
+          <ac:chgData name="Boi, Matteo (DSL)" userId="82f0ed66-5171-4b7b-a4b0-05ee01bcdb77" providerId="ADAL" clId="{84FD0EBE-142F-49EE-BACE-6F78937E4B40}" dt="2026-10-02T10:51:35.630" v="279" actId="1076"/>
+          <ac:spMkLst>
+            <pc:docMk/>
+            <pc:sldMk cId="0" sldId="259"/>
+            <ac:spMk id="26" creationId="{00000000-0000-0000-0000-000000000000}"/>
+          </ac:spMkLst>
+        </pc:spChg>
+        <pc:spChg chg="mod">
+          <ac:chgData name="Boi, Matteo (DSL)" userId="82f0ed66-5171-4b7b-a4b0-05ee01bcdb77" providerId="ADAL" clId="{84FD0EBE-142F-49EE-BACE-6F78937E4B40}" dt="2026-10-02T10:51:45.598" v="298" actId="1036"/>
+          <ac:spMkLst>
+            <pc:docMk/>
+            <pc:sldMk cId="0" sldId="259"/>
+            <ac:spMk id="27" creationId="{00000000-0000-0000-0000-000000000000}"/>
+          </ac:spMkLst>
+        </pc:spChg>
+        <pc:spChg chg="mod">
+          <ac:chgData name="Boi, Matteo (DSL)" userId="82f0ed66-5171-4b7b-a4b0-05ee01bcdb77" providerId="ADAL" clId="{84FD0EBE-142F-49EE-BACE-6F78937E4B40}" dt="2026-10-02T10:51:45.598" v="298" actId="1036"/>
+          <ac:spMkLst>
+            <pc:docMk/>
+            <pc:sldMk cId="0" sldId="259"/>
+            <ac:spMk id="29" creationId="{00000000-0000-0000-0000-000000000000}"/>
+          </ac:spMkLst>
+        </pc:spChg>
+        <pc:spChg chg="mod">
+          <ac:chgData name="Boi, Matteo (DSL)" userId="82f0ed66-5171-4b7b-a4b0-05ee01bcdb77" providerId="ADAL" clId="{84FD0EBE-142F-49EE-BACE-6F78937E4B40}" dt="2026-10-02T10:51:35.630" v="279" actId="1076"/>
           <ac:spMkLst>
             <pc:docMk/>
             <pc:sldMk cId="0" sldId="259"/>
             <ac:spMk id="31" creationId="{00000000-0000-0000-0000-000000000000}"/>
           </ac:spMkLst>
         </pc:spChg>
-        <pc:spChg chg="del">
-          <ac:chgData name="Boi, Matteo (DSL)" userId="82f0ed66-5171-4b7b-a4b0-05ee01bcdb77" providerId="ADAL" clId="{84FD0EBE-142F-49EE-BACE-6F78937E4B40}" dt="2026-09-29T13:55:55.377" v="52" actId="478"/>
+        <pc:spChg chg="mod">
+          <ac:chgData name="Boi, Matteo (DSL)" userId="82f0ed66-5171-4b7b-a4b0-05ee01bcdb77" providerId="ADAL" clId="{84FD0EBE-142F-49EE-BACE-6F78937E4B40}" dt="2026-10-02T10:51:45.598" v="298" actId="1036"/>
           <ac:spMkLst>
             <pc:docMk/>
             <pc:sldMk cId="0" sldId="259"/>
-            <ac:spMk id="32" creationId="{00000000-0000-0000-0000-000000000000}"/>
+            <ac:spMk id="33" creationId="{00000000-0000-0000-0000-000000000000}"/>
           </ac:spMkLst>
         </pc:spChg>
-        <pc:spChg chg="del">
-          <ac:chgData name="Boi, Matteo (DSL)" userId="82f0ed66-5171-4b7b-a4b0-05ee01bcdb77" providerId="ADAL" clId="{84FD0EBE-142F-49EE-BACE-6F78937E4B40}" dt="2026-09-29T13:55:55.377" v="52" actId="478"/>
+        <pc:spChg chg="mod">
+          <ac:chgData name="Boi, Matteo (DSL)" userId="82f0ed66-5171-4b7b-a4b0-05ee01bcdb77" providerId="ADAL" clId="{84FD0EBE-142F-49EE-BACE-6F78937E4B40}" dt="2026-10-02T10:51:45.598" v="298" actId="1036"/>
           <ac:spMkLst>
             <pc:docMk/>
             <pc:sldMk cId="0" sldId="259"/>
-            <ac:spMk id="36" creationId="{00000000-0000-0000-0000-000000000000}"/>
+            <ac:spMk id="35" creationId="{00000000-0000-0000-0000-000000000000}"/>
           </ac:spMkLst>
         </pc:spChg>
         <pc:spChg chg="mod">
@@ -544,6 +560,14 @@
             <ac:spMk id="46" creationId="{00000000-0000-0000-0000-000000000000}"/>
           </ac:spMkLst>
         </pc:spChg>
+        <pc:picChg chg="del">
+          <ac:chgData name="Boi, Matteo (DSL)" userId="82f0ed66-5171-4b7b-a4b0-05ee01bcdb77" providerId="ADAL" clId="{84FD0EBE-142F-49EE-BACE-6F78937E4B40}" dt="2026-10-02T10:51:21.424" v="278" actId="478"/>
+          <ac:picMkLst>
+            <pc:docMk/>
+            <pc:sldMk cId="0" sldId="259"/>
+            <ac:picMk id="17" creationId="{00000000-0000-0000-0000-000000000000}"/>
+          </ac:picMkLst>
+        </pc:picChg>
         <pc:picChg chg="mod">
           <ac:chgData name="Boi, Matteo (DSL)" userId="82f0ed66-5171-4b7b-a4b0-05ee01bcdb77" providerId="ADAL" clId="{84FD0EBE-142F-49EE-BACE-6F78937E4B40}" dt="2026-09-30T09:14:40.079" v="163" actId="1076"/>
           <ac:picMkLst>
@@ -627,20 +651,6 @@
           </ac:spMkLst>
         </pc:spChg>
       </pc:sldChg>
-      <pc:sldChg chg="del">
-        <pc:chgData name="Boi, Matteo (DSL)" userId="82f0ed66-5171-4b7b-a4b0-05ee01bcdb77" providerId="ADAL" clId="{84FD0EBE-142F-49EE-BACE-6F78937E4B40}" dt="2026-09-29T13:56:39.643" v="53" actId="47"/>
-        <pc:sldMkLst>
-          <pc:docMk/>
-          <pc:sldMk cId="0" sldId="266"/>
-        </pc:sldMkLst>
-      </pc:sldChg>
-      <pc:sldChg chg="del">
-        <pc:chgData name="Boi, Matteo (DSL)" userId="82f0ed66-5171-4b7b-a4b0-05ee01bcdb77" providerId="ADAL" clId="{84FD0EBE-142F-49EE-BACE-6F78937E4B40}" dt="2026-09-29T13:56:47.541" v="54" actId="47"/>
-        <pc:sldMkLst>
-          <pc:docMk/>
-          <pc:sldMk cId="0" sldId="267"/>
-        </pc:sldMkLst>
-      </pc:sldChg>
       <pc:sldChg chg="modNotesTx">
         <pc:chgData name="Boi, Matteo (DSL)" userId="82f0ed66-5171-4b7b-a4b0-05ee01bcdb77" providerId="ADAL" clId="{84FD0EBE-142F-49EE-BACE-6F78937E4B40}" dt="2026-09-30T09:48:30.335" v="233" actId="20577"/>
         <pc:sldMkLst>
@@ -681,13 +691,6 @@
         <pc:sldMkLst>
           <pc:docMk/>
           <pc:sldMk cId="0" sldId="273"/>
-        </pc:sldMkLst>
-      </pc:sldChg>
-      <pc:sldChg chg="del">
-        <pc:chgData name="Boi, Matteo (DSL)" userId="82f0ed66-5171-4b7b-a4b0-05ee01bcdb77" providerId="ADAL" clId="{84FD0EBE-142F-49EE-BACE-6F78937E4B40}" dt="2026-09-30T09:23:11.414" v="188" actId="47"/>
-        <pc:sldMkLst>
-          <pc:docMk/>
-          <pc:sldMk cId="0" sldId="274"/>
         </pc:sldMkLst>
       </pc:sldChg>
       <pc:sldChg chg="modSp mod modNotesTx">
@@ -838,14 +841,6 @@
           <pc:docMk/>
           <pc:sldMk cId="0" sldId="285"/>
         </pc:sldMkLst>
-        <pc:spChg chg="del">
-          <ac:chgData name="Boi, Matteo (DSL)" userId="82f0ed66-5171-4b7b-a4b0-05ee01bcdb77" providerId="ADAL" clId="{84FD0EBE-142F-49EE-BACE-6F78937E4B40}" dt="2026-09-30T09:27:56.166" v="214" actId="478"/>
-          <ac:spMkLst>
-            <pc:docMk/>
-            <pc:sldMk cId="0" sldId="285"/>
-            <ac:spMk id="8" creationId="{00000000-0000-0000-0000-000000000000}"/>
-          </ac:spMkLst>
-        </pc:spChg>
       </pc:sldChg>
       <pc:sldChg chg="modNotesTx">
         <pc:chgData name="Boi, Matteo (DSL)" userId="82f0ed66-5171-4b7b-a4b0-05ee01bcdb77" providerId="ADAL" clId="{84FD0EBE-142F-49EE-BACE-6F78937E4B40}" dt="2026-09-30T09:49:22.057" v="251" actId="20577"/>
@@ -1021,7 +1016,7 @@
           <a:p>
             <a:fld id="{A7B39255-9F59-4CB1-AD21-993566954BFE}" type="datetimeFigureOut">
               <a:rPr lang="en-US" smtClean="0"/>
-              <a:t>10/1/2026</a:t>
+              <a:t>10/2/2026</a:t>
             </a:fld>
             <a:endParaRPr lang="en-US"/>
           </a:p>
@@ -3966,7 +3961,7 @@
           <a:p>
             <a:fld id="{F94F2C90-A174-4428-BEA0-8C2E8F6C5F79}" type="datetimeFigureOut">
               <a:rPr lang="it-IT" smtClean="0"/>
-              <a:t>01/10/2026</a:t>
+              <a:t>02/10/2026</a:t>
             </a:fld>
             <a:endParaRPr lang="it-IT"/>
           </a:p>
@@ -4166,7 +4161,7 @@
           <a:p>
             <a:fld id="{F94F2C90-A174-4428-BEA0-8C2E8F6C5F79}" type="datetimeFigureOut">
               <a:rPr lang="it-IT" smtClean="0"/>
-              <a:t>01/10/2026</a:t>
+              <a:t>02/10/2026</a:t>
             </a:fld>
             <a:endParaRPr lang="it-IT"/>
           </a:p>
@@ -4376,7 +4371,7 @@
           <a:p>
             <a:fld id="{F94F2C90-A174-4428-BEA0-8C2E8F6C5F79}" type="datetimeFigureOut">
               <a:rPr lang="it-IT" smtClean="0"/>
-              <a:t>01/10/2026</a:t>
+              <a:t>02/10/2026</a:t>
             </a:fld>
             <a:endParaRPr lang="it-IT"/>
           </a:p>
@@ -4576,7 +4571,7 @@
           <a:p>
             <a:fld id="{F94F2C90-A174-4428-BEA0-8C2E8F6C5F79}" type="datetimeFigureOut">
               <a:rPr lang="it-IT" smtClean="0"/>
-              <a:t>01/10/2026</a:t>
+              <a:t>02/10/2026</a:t>
             </a:fld>
             <a:endParaRPr lang="it-IT"/>
           </a:p>
@@ -4852,7 +4847,7 @@
           <a:p>
             <a:fld id="{F94F2C90-A174-4428-BEA0-8C2E8F6C5F79}" type="datetimeFigureOut">
               <a:rPr lang="it-IT" smtClean="0"/>
-              <a:t>01/10/2026</a:t>
+              <a:t>02/10/2026</a:t>
             </a:fld>
             <a:endParaRPr lang="it-IT"/>
           </a:p>
@@ -5120,7 +5115,7 @@
           <a:p>
             <a:fld id="{F94F2C90-A174-4428-BEA0-8C2E8F6C5F79}" type="datetimeFigureOut">
               <a:rPr lang="it-IT" smtClean="0"/>
-              <a:t>01/10/2026</a:t>
+              <a:t>02/10/2026</a:t>
             </a:fld>
             <a:endParaRPr lang="it-IT"/>
           </a:p>
@@ -5535,7 +5530,7 @@
           <a:p>
             <a:fld id="{F94F2C90-A174-4428-BEA0-8C2E8F6C5F79}" type="datetimeFigureOut">
               <a:rPr lang="it-IT" smtClean="0"/>
-              <a:t>01/10/2026</a:t>
+              <a:t>02/10/2026</a:t>
             </a:fld>
             <a:endParaRPr lang="it-IT"/>
           </a:p>
@@ -5677,7 +5672,7 @@
           <a:p>
             <a:fld id="{F94F2C90-A174-4428-BEA0-8C2E8F6C5F79}" type="datetimeFigureOut">
               <a:rPr lang="it-IT" smtClean="0"/>
-              <a:t>01/10/2026</a:t>
+              <a:t>02/10/2026</a:t>
             </a:fld>
             <a:endParaRPr lang="it-IT"/>
           </a:p>
@@ -5790,7 +5785,7 @@
           <a:p>
             <a:fld id="{F94F2C90-A174-4428-BEA0-8C2E8F6C5F79}" type="datetimeFigureOut">
               <a:rPr lang="it-IT" smtClean="0"/>
-              <a:t>01/10/2026</a:t>
+              <a:t>02/10/2026</a:t>
             </a:fld>
             <a:endParaRPr lang="it-IT"/>
           </a:p>
@@ -6103,7 +6098,7 @@
           <a:p>
             <a:fld id="{F94F2C90-A174-4428-BEA0-8C2E8F6C5F79}" type="datetimeFigureOut">
               <a:rPr lang="it-IT" smtClean="0"/>
-              <a:t>01/10/2026</a:t>
+              <a:t>02/10/2026</a:t>
             </a:fld>
             <a:endParaRPr lang="it-IT"/>
           </a:p>
@@ -6392,7 +6387,7 @@
           <a:p>
             <a:fld id="{F94F2C90-A174-4428-BEA0-8C2E8F6C5F79}" type="datetimeFigureOut">
               <a:rPr lang="it-IT" smtClean="0"/>
-              <a:t>01/10/2026</a:t>
+              <a:t>02/10/2026</a:t>
             </a:fld>
             <a:endParaRPr lang="it-IT"/>
           </a:p>
@@ -6635,7 +6630,7 @@
           <a:p>
             <a:fld id="{F94F2C90-A174-4428-BEA0-8C2E8F6C5F79}" type="datetimeFigureOut">
               <a:rPr lang="it-IT" smtClean="0"/>
-              <a:t>01/10/2026</a:t>
+              <a:t>02/10/2026</a:t>
             </a:fld>
             <a:endParaRPr lang="it-IT"/>
           </a:p>
@@ -19251,7 +19246,7 @@
         <p:spPr>
           <a:xfrm>
             <a:off x="502920" y="4892040"/>
-            <a:ext cx="11247120" cy="502920"/>
+            <a:ext cx="11247120" cy="400110"/>
           </a:xfrm>
           <a:prstGeom prst="rect">
             <a:avLst/>
@@ -19271,7 +19266,7 @@
                   <a:srgbClr val="FF0000"/>
                 </a:solidFill>
               </a:rPr>
-              <a:t>Whatever you raised: you are in the right room.</a:t>
+              <a:t>Whatever: you are in the right room.</a:t>
             </a:r>
           </a:p>
         </p:txBody>
@@ -36499,7 +36494,7 @@
           <a:p>
             <a:pPr algn="l"/>
             <a:r>
-              <a:rPr sz="1600" b="0" i="0">
+              <a:rPr sz="1600" b="0" i="0" dirty="0">
                 <a:solidFill>
                   <a:srgbClr val="595959"/>
                 </a:solidFill>
@@ -37363,7 +37358,7 @@
                                           </p:stCondLst>
                                         </p:cTn>
                                         <p:tgtEl>
-                                          <p:spTgt spid="10"/>
+                                          <p:spTgt spid="18"/>
                                         </p:tgtEl>
                                         <p:attrNameLst>
                                           <p:attrName>style.visibility</p:attrName>
@@ -37377,7 +37372,7 @@
                                       <p:cBhvr>
                                         <p:cTn id="21" dur="500"/>
                                         <p:tgtEl>
-                                          <p:spTgt spid="10"/>
+                                          <p:spTgt spid="18"/>
                                         </p:tgtEl>
                                       </p:cBhvr>
                                     </p:animEffect>
@@ -37385,7 +37380,7 @@
                                 </p:cTn>
                               </p:par>
                               <p:par>
-                                <p:cTn id="22" presetID="10" presetClass="entr" presetSubtype="0" fill="hold" nodeType="withEffect">
+                                <p:cTn id="22" presetID="10" presetClass="entr" presetSubtype="0" fill="hold" grpId="0" nodeType="withEffect">
                                   <p:stCondLst>
                                     <p:cond delay="0"/>
                                   </p:stCondLst>
@@ -37398,7 +37393,7 @@
                                           </p:stCondLst>
                                         </p:cTn>
                                         <p:tgtEl>
-                                          <p:spTgt spid="11"/>
+                                          <p:spTgt spid="19"/>
                                         </p:tgtEl>
                                         <p:attrNameLst>
                                           <p:attrName>style.visibility</p:attrName>
@@ -37412,7 +37407,7 @@
                                       <p:cBhvr>
                                         <p:cTn id="24" dur="500"/>
                                         <p:tgtEl>
-                                          <p:spTgt spid="11"/>
+                                          <p:spTgt spid="19"/>
                                         </p:tgtEl>
                                       </p:cBhvr>
                                     </p:animEffect>
@@ -37433,7 +37428,7 @@
                                           </p:stCondLst>
                                         </p:cTn>
                                         <p:tgtEl>
-                                          <p:spTgt spid="12"/>
+                                          <p:spTgt spid="20"/>
                                         </p:tgtEl>
                                         <p:attrNameLst>
                                           <p:attrName>style.visibility</p:attrName>
@@ -37447,7 +37442,7 @@
                                       <p:cBhvr>
                                         <p:cTn id="27" dur="500"/>
                                         <p:tgtEl>
-                                          <p:spTgt spid="12"/>
+                                          <p:spTgt spid="20"/>
                                         </p:tgtEl>
                                       </p:cBhvr>
                                     </p:animEffect>
@@ -37468,7 +37463,7 @@
                                           </p:stCondLst>
                                         </p:cTn>
                                         <p:tgtEl>
-                                          <p:spTgt spid="13"/>
+                                          <p:spTgt spid="21"/>
                                         </p:tgtEl>
                                         <p:attrNameLst>
                                           <p:attrName>style.visibility</p:attrName>
@@ -37482,164 +37477,6 @@
                                       <p:cBhvr>
                                         <p:cTn id="30" dur="500"/>
                                         <p:tgtEl>
-                                          <p:spTgt spid="13"/>
-                                        </p:tgtEl>
-                                      </p:cBhvr>
-                                    </p:animEffect>
-                                  </p:childTnLst>
-                                </p:cTn>
-                              </p:par>
-                            </p:childTnLst>
-                          </p:cTn>
-                        </p:par>
-                      </p:childTnLst>
-                    </p:cTn>
-                  </p:par>
-                  <p:par>
-                    <p:cTn id="31" fill="hold">
-                      <p:stCondLst>
-                        <p:cond delay="indefinite"/>
-                      </p:stCondLst>
-                      <p:childTnLst>
-                        <p:par>
-                          <p:cTn id="32" fill="hold">
-                            <p:stCondLst>
-                              <p:cond delay="0"/>
-                            </p:stCondLst>
-                            <p:childTnLst>
-                              <p:par>
-                                <p:cTn id="33" presetID="10" presetClass="entr" presetSubtype="0" fill="hold" grpId="0" nodeType="clickEffect">
-                                  <p:stCondLst>
-                                    <p:cond delay="0"/>
-                                  </p:stCondLst>
-                                  <p:childTnLst>
-                                    <p:set>
-                                      <p:cBhvr>
-                                        <p:cTn id="34" dur="1" fill="hold">
-                                          <p:stCondLst>
-                                            <p:cond delay="0"/>
-                                          </p:stCondLst>
-                                        </p:cTn>
-                                        <p:tgtEl>
-                                          <p:spTgt spid="18"/>
-                                        </p:tgtEl>
-                                        <p:attrNameLst>
-                                          <p:attrName>style.visibility</p:attrName>
-                                        </p:attrNameLst>
-                                      </p:cBhvr>
-                                      <p:to>
-                                        <p:strVal val="visible"/>
-                                      </p:to>
-                                    </p:set>
-                                    <p:animEffect transition="in" filter="fade">
-                                      <p:cBhvr>
-                                        <p:cTn id="35" dur="500"/>
-                                        <p:tgtEl>
-                                          <p:spTgt spid="18"/>
-                                        </p:tgtEl>
-                                      </p:cBhvr>
-                                    </p:animEffect>
-                                  </p:childTnLst>
-                                </p:cTn>
-                              </p:par>
-                              <p:par>
-                                <p:cTn id="36" presetID="10" presetClass="entr" presetSubtype="0" fill="hold" grpId="0" nodeType="withEffect">
-                                  <p:stCondLst>
-                                    <p:cond delay="0"/>
-                                  </p:stCondLst>
-                                  <p:childTnLst>
-                                    <p:set>
-                                      <p:cBhvr>
-                                        <p:cTn id="37" dur="1" fill="hold">
-                                          <p:stCondLst>
-                                            <p:cond delay="0"/>
-                                          </p:stCondLst>
-                                        </p:cTn>
-                                        <p:tgtEl>
-                                          <p:spTgt spid="19"/>
-                                        </p:tgtEl>
-                                        <p:attrNameLst>
-                                          <p:attrName>style.visibility</p:attrName>
-                                        </p:attrNameLst>
-                                      </p:cBhvr>
-                                      <p:to>
-                                        <p:strVal val="visible"/>
-                                      </p:to>
-                                    </p:set>
-                                    <p:animEffect transition="in" filter="fade">
-                                      <p:cBhvr>
-                                        <p:cTn id="38" dur="500"/>
-                                        <p:tgtEl>
-                                          <p:spTgt spid="19"/>
-                                        </p:tgtEl>
-                                      </p:cBhvr>
-                                    </p:animEffect>
-                                  </p:childTnLst>
-                                </p:cTn>
-                              </p:par>
-                              <p:par>
-                                <p:cTn id="39" presetID="10" presetClass="entr" presetSubtype="0" fill="hold" grpId="0" nodeType="withEffect">
-                                  <p:stCondLst>
-                                    <p:cond delay="0"/>
-                                  </p:stCondLst>
-                                  <p:childTnLst>
-                                    <p:set>
-                                      <p:cBhvr>
-                                        <p:cTn id="40" dur="1" fill="hold">
-                                          <p:stCondLst>
-                                            <p:cond delay="0"/>
-                                          </p:stCondLst>
-                                        </p:cTn>
-                                        <p:tgtEl>
-                                          <p:spTgt spid="20"/>
-                                        </p:tgtEl>
-                                        <p:attrNameLst>
-                                          <p:attrName>style.visibility</p:attrName>
-                                        </p:attrNameLst>
-                                      </p:cBhvr>
-                                      <p:to>
-                                        <p:strVal val="visible"/>
-                                      </p:to>
-                                    </p:set>
-                                    <p:animEffect transition="in" filter="fade">
-                                      <p:cBhvr>
-                                        <p:cTn id="41" dur="500"/>
-                                        <p:tgtEl>
-                                          <p:spTgt spid="20"/>
-                                        </p:tgtEl>
-                                      </p:cBhvr>
-                                    </p:animEffect>
-                                  </p:childTnLst>
-                                </p:cTn>
-                              </p:par>
-                              <p:par>
-                                <p:cTn id="42" presetID="10" presetClass="entr" presetSubtype="0" fill="hold" grpId="0" nodeType="withEffect">
-                                  <p:stCondLst>
-                                    <p:cond delay="0"/>
-                                  </p:stCondLst>
-                                  <p:childTnLst>
-                                    <p:set>
-                                      <p:cBhvr>
-                                        <p:cTn id="43" dur="1" fill="hold">
-                                          <p:stCondLst>
-                                            <p:cond delay="0"/>
-                                          </p:stCondLst>
-                                        </p:cTn>
-                                        <p:tgtEl>
-                                          <p:spTgt spid="21"/>
-                                        </p:tgtEl>
-                                        <p:attrNameLst>
-                                          <p:attrName>style.visibility</p:attrName>
-                                        </p:attrNameLst>
-                                      </p:cBhvr>
-                                      <p:to>
-                                        <p:strVal val="visible"/>
-                                      </p:to>
-                                    </p:set>
-                                    <p:animEffect transition="in" filter="fade">
-                                      <p:cBhvr>
-                                        <p:cTn id="44" dur="500"/>
-                                        <p:tgtEl>
                                           <p:spTgt spid="21"/>
                                         </p:tgtEl>
                                       </p:cBhvr>
@@ -37648,14 +37485,14 @@
                                 </p:cTn>
                               </p:par>
                               <p:par>
-                                <p:cTn id="45" presetID="10" presetClass="entr" presetSubtype="0" fill="hold" nodeType="withEffect">
+                                <p:cTn id="31" presetID="10" presetClass="entr" presetSubtype="0" fill="hold" nodeType="withEffect">
                                   <p:stCondLst>
                                     <p:cond delay="0"/>
                                   </p:stCondLst>
                                   <p:childTnLst>
                                     <p:set>
                                       <p:cBhvr>
-                                        <p:cTn id="46" dur="1" fill="hold">
+                                        <p:cTn id="32" dur="1" fill="hold">
                                           <p:stCondLst>
                                             <p:cond delay="0"/>
                                           </p:stCondLst>
@@ -37673,7 +37510,7 @@
                                     </p:set>
                                     <p:animEffect transition="in" filter="fade">
                                       <p:cBhvr>
-                                        <p:cTn id="47" dur="500"/>
+                                        <p:cTn id="33" dur="500"/>
                                         <p:tgtEl>
                                           <p:spTgt spid="22"/>
                                         </p:tgtEl>
@@ -37683,14 +37520,14 @@
                                 </p:cTn>
                               </p:par>
                               <p:par>
-                                <p:cTn id="48" presetID="10" presetClass="entr" presetSubtype="0" fill="hold" grpId="0" nodeType="withEffect">
+                                <p:cTn id="34" presetID="10" presetClass="entr" presetSubtype="0" fill="hold" grpId="0" nodeType="withEffect">
                                   <p:stCondLst>
                                     <p:cond delay="0"/>
                                   </p:stCondLst>
                                   <p:childTnLst>
                                     <p:set>
                                       <p:cBhvr>
-                                        <p:cTn id="49" dur="1" fill="hold">
+                                        <p:cTn id="35" dur="1" fill="hold">
                                           <p:stCondLst>
                                             <p:cond delay="0"/>
                                           </p:stCondLst>
@@ -37708,7 +37545,7 @@
                                     </p:set>
                                     <p:animEffect transition="in" filter="fade">
                                       <p:cBhvr>
-                                        <p:cTn id="50" dur="500"/>
+                                        <p:cTn id="36" dur="500"/>
                                         <p:tgtEl>
                                           <p:spTgt spid="23"/>
                                         </p:tgtEl>
@@ -37718,14 +37555,14 @@
                                 </p:cTn>
                               </p:par>
                               <p:par>
-                                <p:cTn id="51" presetID="10" presetClass="entr" presetSubtype="0" fill="hold" grpId="0" nodeType="withEffect">
+                                <p:cTn id="37" presetID="10" presetClass="entr" presetSubtype="0" fill="hold" grpId="0" nodeType="withEffect">
                                   <p:stCondLst>
                                     <p:cond delay="0"/>
                                   </p:stCondLst>
                                   <p:childTnLst>
                                     <p:set>
                                       <p:cBhvr>
-                                        <p:cTn id="52" dur="1" fill="hold">
+                                        <p:cTn id="38" dur="1" fill="hold">
                                           <p:stCondLst>
                                             <p:cond delay="0"/>
                                           </p:stCondLst>
@@ -37743,7 +37580,7 @@
                                     </p:set>
                                     <p:animEffect transition="in" filter="fade">
                                       <p:cBhvr>
-                                        <p:cTn id="53" dur="500"/>
+                                        <p:cTn id="39" dur="500"/>
                                         <p:tgtEl>
                                           <p:spTgt spid="24"/>
                                         </p:tgtEl>
@@ -37753,14 +37590,14 @@
                                 </p:cTn>
                               </p:par>
                               <p:par>
-                                <p:cTn id="54" presetID="10" presetClass="entr" presetSubtype="0" fill="hold" grpId="0" nodeType="withEffect">
+                                <p:cTn id="40" presetID="10" presetClass="entr" presetSubtype="0" fill="hold" grpId="0" nodeType="withEffect">
                                   <p:stCondLst>
                                     <p:cond delay="0"/>
                                   </p:stCondLst>
                                   <p:childTnLst>
                                     <p:set>
                                       <p:cBhvr>
-                                        <p:cTn id="55" dur="1" fill="hold">
+                                        <p:cTn id="41" dur="1" fill="hold">
                                           <p:stCondLst>
                                             <p:cond delay="0"/>
                                           </p:stCondLst>
@@ -37778,7 +37615,7 @@
                                     </p:set>
                                     <p:animEffect transition="in" filter="fade">
                                       <p:cBhvr>
-                                        <p:cTn id="56" dur="500"/>
+                                        <p:cTn id="42" dur="500"/>
                                         <p:tgtEl>
                                           <p:spTgt spid="25"/>
                                         </p:tgtEl>
@@ -37788,14 +37625,14 @@
                                 </p:cTn>
                               </p:par>
                               <p:par>
-                                <p:cTn id="57" presetID="10" presetClass="entr" presetSubtype="0" fill="hold" grpId="0" nodeType="withEffect">
+                                <p:cTn id="43" presetID="10" presetClass="entr" presetSubtype="0" fill="hold" grpId="0" nodeType="withEffect">
                                   <p:stCondLst>
                                     <p:cond delay="0"/>
                                   </p:stCondLst>
                                   <p:childTnLst>
                                     <p:set>
                                       <p:cBhvr>
-                                        <p:cTn id="58" dur="1" fill="hold">
+                                        <p:cTn id="44" dur="1" fill="hold">
                                           <p:stCondLst>
                                             <p:cond delay="0"/>
                                           </p:stCondLst>
@@ -37813,9 +37650,167 @@
                                     </p:set>
                                     <p:animEffect transition="in" filter="fade">
                                       <p:cBhvr>
+                                        <p:cTn id="45" dur="500"/>
+                                        <p:tgtEl>
+                                          <p:spTgt spid="26"/>
+                                        </p:tgtEl>
+                                      </p:cBhvr>
+                                    </p:animEffect>
+                                  </p:childTnLst>
+                                </p:cTn>
+                              </p:par>
+                              <p:par>
+                                <p:cTn id="46" presetID="10" presetClass="entr" presetSubtype="0" fill="hold" grpId="0" nodeType="withEffect">
+                                  <p:stCondLst>
+                                    <p:cond delay="0"/>
+                                  </p:stCondLst>
+                                  <p:childTnLst>
+                                    <p:set>
+                                      <p:cBhvr>
+                                        <p:cTn id="47" dur="1" fill="hold">
+                                          <p:stCondLst>
+                                            <p:cond delay="0"/>
+                                          </p:stCondLst>
+                                        </p:cTn>
+                                        <p:tgtEl>
+                                          <p:spTgt spid="27"/>
+                                        </p:tgtEl>
+                                        <p:attrNameLst>
+                                          <p:attrName>style.visibility</p:attrName>
+                                        </p:attrNameLst>
+                                      </p:cBhvr>
+                                      <p:to>
+                                        <p:strVal val="visible"/>
+                                      </p:to>
+                                    </p:set>
+                                    <p:animEffect transition="in" filter="fade">
+                                      <p:cBhvr>
+                                        <p:cTn id="48" dur="500"/>
+                                        <p:tgtEl>
+                                          <p:spTgt spid="27"/>
+                                        </p:tgtEl>
+                                      </p:cBhvr>
+                                    </p:animEffect>
+                                  </p:childTnLst>
+                                </p:cTn>
+                              </p:par>
+                              <p:par>
+                                <p:cTn id="49" presetID="10" presetClass="entr" presetSubtype="0" fill="hold" grpId="0" nodeType="withEffect">
+                                  <p:stCondLst>
+                                    <p:cond delay="0"/>
+                                  </p:stCondLst>
+                                  <p:childTnLst>
+                                    <p:set>
+                                      <p:cBhvr>
+                                        <p:cTn id="50" dur="1" fill="hold">
+                                          <p:stCondLst>
+                                            <p:cond delay="0"/>
+                                          </p:stCondLst>
+                                        </p:cTn>
+                                        <p:tgtEl>
+                                          <p:spTgt spid="28"/>
+                                        </p:tgtEl>
+                                        <p:attrNameLst>
+                                          <p:attrName>style.visibility</p:attrName>
+                                        </p:attrNameLst>
+                                      </p:cBhvr>
+                                      <p:to>
+                                        <p:strVal val="visible"/>
+                                      </p:to>
+                                    </p:set>
+                                    <p:animEffect transition="in" filter="fade">
+                                      <p:cBhvr>
+                                        <p:cTn id="51" dur="500"/>
+                                        <p:tgtEl>
+                                          <p:spTgt spid="28"/>
+                                        </p:tgtEl>
+                                      </p:cBhvr>
+                                    </p:animEffect>
+                                  </p:childTnLst>
+                                </p:cTn>
+                              </p:par>
+                            </p:childTnLst>
+                          </p:cTn>
+                        </p:par>
+                      </p:childTnLst>
+                    </p:cTn>
+                  </p:par>
+                  <p:par>
+                    <p:cTn id="52" fill="hold">
+                      <p:stCondLst>
+                        <p:cond delay="indefinite"/>
+                      </p:stCondLst>
+                      <p:childTnLst>
+                        <p:par>
+                          <p:cTn id="53" fill="hold">
+                            <p:stCondLst>
+                              <p:cond delay="0"/>
+                            </p:stCondLst>
+                            <p:childTnLst>
+                              <p:par>
+                                <p:cTn id="54" presetID="10" presetClass="entr" presetSubtype="0" fill="hold" grpId="0" nodeType="clickEffect">
+                                  <p:stCondLst>
+                                    <p:cond delay="0"/>
+                                  </p:stCondLst>
+                                  <p:childTnLst>
+                                    <p:set>
+                                      <p:cBhvr>
+                                        <p:cTn id="55" dur="1" fill="hold">
+                                          <p:stCondLst>
+                                            <p:cond delay="0"/>
+                                          </p:stCondLst>
+                                        </p:cTn>
+                                        <p:tgtEl>
+                                          <p:spTgt spid="10"/>
+                                        </p:tgtEl>
+                                        <p:attrNameLst>
+                                          <p:attrName>style.visibility</p:attrName>
+                                        </p:attrNameLst>
+                                      </p:cBhvr>
+                                      <p:to>
+                                        <p:strVal val="visible"/>
+                                      </p:to>
+                                    </p:set>
+                                    <p:animEffect transition="in" filter="fade">
+                                      <p:cBhvr>
+                                        <p:cTn id="56" dur="500"/>
+                                        <p:tgtEl>
+                                          <p:spTgt spid="10"/>
+                                        </p:tgtEl>
+                                      </p:cBhvr>
+                                    </p:animEffect>
+                                  </p:childTnLst>
+                                </p:cTn>
+                              </p:par>
+                              <p:par>
+                                <p:cTn id="57" presetID="10" presetClass="entr" presetSubtype="0" fill="hold" nodeType="withEffect">
+                                  <p:stCondLst>
+                                    <p:cond delay="0"/>
+                                  </p:stCondLst>
+                                  <p:childTnLst>
+                                    <p:set>
+                                      <p:cBhvr>
+                                        <p:cTn id="58" dur="1" fill="hold">
+                                          <p:stCondLst>
+                                            <p:cond delay="0"/>
+                                          </p:stCondLst>
+                                        </p:cTn>
+                                        <p:tgtEl>
+                                          <p:spTgt spid="11"/>
+                                        </p:tgtEl>
+                                        <p:attrNameLst>
+                                          <p:attrName>style.visibility</p:attrName>
+                                        </p:attrNameLst>
+                                      </p:cBhvr>
+                                      <p:to>
+                                        <p:strVal val="visible"/>
+                                      </p:to>
+                                    </p:set>
+                                    <p:animEffect transition="in" filter="fade">
+                                      <p:cBhvr>
                                         <p:cTn id="59" dur="500"/>
                                         <p:tgtEl>
-                                          <p:spTgt spid="26"/>
+                                          <p:spTgt spid="11"/>
                                         </p:tgtEl>
                                       </p:cBhvr>
                                     </p:animEffect>
@@ -37836,7 +37831,7 @@
                                           </p:stCondLst>
                                         </p:cTn>
                                         <p:tgtEl>
-                                          <p:spTgt spid="27"/>
+                                          <p:spTgt spid="12"/>
                                         </p:tgtEl>
                                         <p:attrNameLst>
                                           <p:attrName>style.visibility</p:attrName>
@@ -37850,7 +37845,7 @@
                                       <p:cBhvr>
                                         <p:cTn id="62" dur="500"/>
                                         <p:tgtEl>
-                                          <p:spTgt spid="27"/>
+                                          <p:spTgt spid="12"/>
                                         </p:tgtEl>
                                       </p:cBhvr>
                                     </p:animEffect>
@@ -37871,7 +37866,7 @@
                                           </p:stCondLst>
                                         </p:cTn>
                                         <p:tgtEl>
-                                          <p:spTgt spid="28"/>
+                                          <p:spTgt spid="13"/>
                                         </p:tgtEl>
                                         <p:attrNameLst>
                                           <p:attrName>style.visibility</p:attrName>
@@ -37885,7 +37880,7 @@
                                       <p:cBhvr>
                                         <p:cTn id="65" dur="500"/>
                                         <p:tgtEl>
-                                          <p:spTgt spid="28"/>
+                                          <p:spTgt spid="13"/>
                                         </p:tgtEl>
                                       </p:cBhvr>
                                     </p:animEffect>
@@ -38201,25 +38196,7 @@
                 </a:solidFill>
                 <a:latin typeface="+mn-lt"/>
               </a:rPr>
-              <a:t>Today’s plan (1 h </a:t>
-            </a:r>
-            <a:r>
-              <a:rPr lang="en-US" sz="4000" b="1">
-                <a:solidFill>
-                  <a:srgbClr val="000000"/>
-                </a:solidFill>
-                <a:latin typeface="+mn-lt"/>
-              </a:rPr>
-              <a:t>30</a:t>
-            </a:r>
-            <a:r>
-              <a:rPr sz="4000" b="1">
-                <a:solidFill>
-                  <a:srgbClr val="000000"/>
-                </a:solidFill>
-                <a:latin typeface="+mn-lt"/>
-              </a:rPr>
-              <a:t>)</a:t>
+              <a:t>Today’s plan (1 h 45)</a:t>
             </a:r>
           </a:p>
         </p:txBody>
@@ -38326,7 +38303,7 @@
         </p:nvSpPr>
         <p:spPr>
           <a:xfrm>
-            <a:off x="502920" y="1143000"/>
+            <a:off x="502920" y="1384534"/>
             <a:ext cx="411480" cy="411480"/>
           </a:xfrm>
           <a:prstGeom prst="ellipse">
@@ -38379,7 +38356,7 @@
         </p:blipFill>
         <p:spPr>
           <a:xfrm>
-            <a:off x="601675" y="1241755"/>
+            <a:off x="601675" y="1483289"/>
             <a:ext cx="213969" cy="213969"/>
           </a:xfrm>
           <a:prstGeom prst="rect">
@@ -38395,7 +38372,7 @@
         </p:nvSpPr>
         <p:spPr>
           <a:xfrm>
-            <a:off x="1097280" y="1174891"/>
+            <a:off x="1097280" y="1416425"/>
             <a:ext cx="4572000" cy="338554"/>
           </a:xfrm>
           <a:prstGeom prst="rect">
@@ -38442,7 +38419,7 @@
         </p:nvSpPr>
         <p:spPr>
           <a:xfrm>
-            <a:off x="502920" y="1655064"/>
+            <a:off x="502920" y="1896598"/>
             <a:ext cx="411480" cy="411480"/>
           </a:xfrm>
           <a:prstGeom prst="ellipse">
@@ -38494,7 +38471,7 @@
         </p:nvSpPr>
         <p:spPr>
           <a:xfrm>
-            <a:off x="1097280" y="1627632"/>
+            <a:off x="1097280" y="1869166"/>
             <a:ext cx="4572000" cy="457200"/>
           </a:xfrm>
           <a:prstGeom prst="rect">
@@ -38528,7 +38505,7 @@
         </p:nvSpPr>
         <p:spPr>
           <a:xfrm>
-            <a:off x="502920" y="2167128"/>
+            <a:off x="502920" y="2408662"/>
             <a:ext cx="411480" cy="411480"/>
           </a:xfrm>
           <a:prstGeom prst="ellipse">
@@ -38580,7 +38557,7 @@
         </p:nvSpPr>
         <p:spPr>
           <a:xfrm>
-            <a:off x="1097280" y="2139696"/>
+            <a:off x="1097280" y="2381230"/>
             <a:ext cx="4572000" cy="457200"/>
           </a:xfrm>
           <a:prstGeom prst="rect">
@@ -38608,13 +38585,271 @@
       </p:sp>
       <p:sp>
         <p:nvSpPr>
-          <p:cNvPr id="16" name="Oval 15"/>
+          <p:cNvPr id="20" name="Oval 19"/>
           <p:cNvSpPr/>
           <p:nvPr/>
         </p:nvSpPr>
         <p:spPr>
           <a:xfrm>
-            <a:off x="502920" y="2679192"/>
+            <a:off x="502920" y="2947787"/>
+            <a:ext cx="411480" cy="411480"/>
+          </a:xfrm>
+          <a:prstGeom prst="ellipse">
+            <a:avLst/>
+          </a:prstGeom>
+          <a:solidFill>
+            <a:srgbClr val="FF0000"/>
+          </a:solidFill>
+          <a:ln>
+            <a:noFill/>
+          </a:ln>
+          <a:effectLst/>
+        </p:spPr>
+        <p:style>
+          <a:lnRef idx="1">
+            <a:schemeClr val="accent1"/>
+          </a:lnRef>
+          <a:fillRef idx="3">
+            <a:schemeClr val="accent1"/>
+          </a:fillRef>
+          <a:effectRef idx="2">
+            <a:schemeClr val="accent1"/>
+          </a:effectRef>
+          <a:fontRef idx="minor">
+            <a:schemeClr val="lt1"/>
+          </a:fontRef>
+        </p:style>
+        <p:txBody>
+          <a:bodyPr wrap="square" lIns="0" tIns="0" rIns="0" bIns="0" rtlCol="0" anchor="ctr"/>
+          <a:lstStyle/>
+          <a:p>
+            <a:pPr algn="ctr"/>
+            <a:r>
+              <a:rPr sz="1800" b="1" i="0">
+                <a:solidFill>
+                  <a:srgbClr val="FFFFFF"/>
+                </a:solidFill>
+              </a:rPr>
+              <a:t>3</a:t>
+            </a:r>
+          </a:p>
+        </p:txBody>
+      </p:sp>
+      <p:sp>
+        <p:nvSpPr>
+          <p:cNvPr id="21" name="TextBox 20"/>
+          <p:cNvSpPr txBox="1"/>
+          <p:nvPr/>
+        </p:nvSpPr>
+        <p:spPr>
+          <a:xfrm>
+            <a:off x="1097280" y="2920355"/>
+            <a:ext cx="4572000" cy="457200"/>
+          </a:xfrm>
+          <a:prstGeom prst="rect">
+            <a:avLst/>
+          </a:prstGeom>
+          <a:noFill/>
+        </p:spPr>
+        <p:txBody>
+          <a:bodyPr wrap="square" lIns="0" tIns="0" rIns="0" bIns="0" anchor="ctr">
+            <a:spAutoFit/>
+          </a:bodyPr>
+          <a:lstStyle/>
+          <a:p>
+            <a:pPr algn="l"/>
+            <a:r>
+              <a:rPr sz="2200" b="1" i="0">
+                <a:solidFill>
+                  <a:srgbClr val="000000"/>
+                </a:solidFill>
+              </a:rPr>
+              <a:t>uv, the package manager</a:t>
+            </a:r>
+          </a:p>
+        </p:txBody>
+      </p:sp>
+      <p:sp>
+        <p:nvSpPr>
+          <p:cNvPr id="23" name="Oval 22"/>
+          <p:cNvSpPr/>
+          <p:nvPr/>
+        </p:nvSpPr>
+        <p:spPr>
+          <a:xfrm>
+            <a:off x="502920" y="3459851"/>
+            <a:ext cx="411480" cy="411480"/>
+          </a:xfrm>
+          <a:prstGeom prst="ellipse">
+            <a:avLst/>
+          </a:prstGeom>
+          <a:solidFill>
+            <a:srgbClr val="FF0000"/>
+          </a:solidFill>
+          <a:ln>
+            <a:noFill/>
+          </a:ln>
+          <a:effectLst/>
+        </p:spPr>
+        <p:style>
+          <a:lnRef idx="1">
+            <a:schemeClr val="accent1"/>
+          </a:lnRef>
+          <a:fillRef idx="3">
+            <a:schemeClr val="accent1"/>
+          </a:fillRef>
+          <a:effectRef idx="2">
+            <a:schemeClr val="accent1"/>
+          </a:effectRef>
+          <a:fontRef idx="minor">
+            <a:schemeClr val="lt1"/>
+          </a:fontRef>
+        </p:style>
+        <p:txBody>
+          <a:bodyPr wrap="square" lIns="0" tIns="0" rIns="0" bIns="0" rtlCol="0" anchor="ctr"/>
+          <a:lstStyle/>
+          <a:p>
+            <a:pPr algn="ctr"/>
+            <a:r>
+              <a:rPr sz="1800" b="1" i="0">
+                <a:solidFill>
+                  <a:srgbClr val="FFFFFF"/>
+                </a:solidFill>
+              </a:rPr>
+              <a:t>4</a:t>
+            </a:r>
+          </a:p>
+        </p:txBody>
+      </p:sp>
+      <p:sp>
+        <p:nvSpPr>
+          <p:cNvPr id="24" name="TextBox 23"/>
+          <p:cNvSpPr txBox="1"/>
+          <p:nvPr/>
+        </p:nvSpPr>
+        <p:spPr>
+          <a:xfrm>
+            <a:off x="1097280" y="3432419"/>
+            <a:ext cx="4572000" cy="457200"/>
+          </a:xfrm>
+          <a:prstGeom prst="rect">
+            <a:avLst/>
+          </a:prstGeom>
+          <a:noFill/>
+        </p:spPr>
+        <p:txBody>
+          <a:bodyPr wrap="square" lIns="0" tIns="0" rIns="0" bIns="0" anchor="ctr">
+            <a:spAutoFit/>
+          </a:bodyPr>
+          <a:lstStyle/>
+          <a:p>
+            <a:pPr algn="l"/>
+            <a:r>
+              <a:rPr sz="2200" b="1" i="0">
+                <a:solidFill>
+                  <a:srgbClr val="000000"/>
+                </a:solidFill>
+              </a:rPr>
+              <a:t>JupyterLab, your notebook</a:t>
+            </a:r>
+          </a:p>
+        </p:txBody>
+      </p:sp>
+      <p:sp>
+        <p:nvSpPr>
+          <p:cNvPr id="26" name="Oval 25"/>
+          <p:cNvSpPr/>
+          <p:nvPr/>
+        </p:nvSpPr>
+        <p:spPr>
+          <a:xfrm>
+            <a:off x="502920" y="3971915"/>
+            <a:ext cx="411480" cy="411480"/>
+          </a:xfrm>
+          <a:prstGeom prst="ellipse">
+            <a:avLst/>
+          </a:prstGeom>
+          <a:solidFill>
+            <a:srgbClr val="FF0000"/>
+          </a:solidFill>
+          <a:ln>
+            <a:noFill/>
+          </a:ln>
+          <a:effectLst/>
+        </p:spPr>
+        <p:style>
+          <a:lnRef idx="1">
+            <a:schemeClr val="accent1"/>
+          </a:lnRef>
+          <a:fillRef idx="3">
+            <a:schemeClr val="accent1"/>
+          </a:fillRef>
+          <a:effectRef idx="2">
+            <a:schemeClr val="accent1"/>
+          </a:effectRef>
+          <a:fontRef idx="minor">
+            <a:schemeClr val="lt1"/>
+          </a:fontRef>
+        </p:style>
+        <p:txBody>
+          <a:bodyPr wrap="square" lIns="0" tIns="0" rIns="0" bIns="0" rtlCol="0" anchor="ctr"/>
+          <a:lstStyle/>
+          <a:p>
+            <a:pPr algn="ctr"/>
+            <a:r>
+              <a:rPr sz="1800" b="1" i="0">
+                <a:solidFill>
+                  <a:srgbClr val="FFFFFF"/>
+                </a:solidFill>
+              </a:rPr>
+              <a:t>5</a:t>
+            </a:r>
+          </a:p>
+        </p:txBody>
+      </p:sp>
+      <p:sp>
+        <p:nvSpPr>
+          <p:cNvPr id="27" name="TextBox 26"/>
+          <p:cNvSpPr txBox="1"/>
+          <p:nvPr/>
+        </p:nvSpPr>
+        <p:spPr>
+          <a:xfrm>
+            <a:off x="1097280" y="3944483"/>
+            <a:ext cx="4572000" cy="457200"/>
+          </a:xfrm>
+          <a:prstGeom prst="rect">
+            <a:avLst/>
+          </a:prstGeom>
+          <a:noFill/>
+        </p:spPr>
+        <p:txBody>
+          <a:bodyPr wrap="square" lIns="0" tIns="0" rIns="0" bIns="0" anchor="ctr">
+            <a:spAutoFit/>
+          </a:bodyPr>
+          <a:lstStyle/>
+          <a:p>
+            <a:pPr algn="l"/>
+            <a:r>
+              <a:rPr sz="2200" b="1" i="0">
+                <a:solidFill>
+                  <a:srgbClr val="000000"/>
+                </a:solidFill>
+              </a:rPr>
+              <a:t>Live demo: set it all up</a:t>
+            </a:r>
+          </a:p>
+        </p:txBody>
+      </p:sp>
+      <p:sp>
+        <p:nvSpPr>
+          <p:cNvPr id="29" name="Oval 28"/>
+          <p:cNvSpPr/>
+          <p:nvPr/>
+        </p:nvSpPr>
+        <p:spPr>
+          <a:xfrm>
+            <a:off x="502920" y="4483979"/>
             <a:ext cx="411480" cy="411480"/>
           </a:xfrm>
           <a:prstGeom prst="ellipse">
@@ -38653,7 +38888,7 @@
       </p:sp>
       <p:pic>
         <p:nvPicPr>
-          <p:cNvPr id="17" name="Picture 16" descr="FaMugHot_FFFFFF.png"/>
+          <p:cNvPr id="30" name="Picture 29" descr="FaLaptop_FFFFFF.png"/>
           <p:cNvPicPr>
             <a:picLocks noChangeAspect="1"/>
           </p:cNvPicPr>
@@ -38667,7 +38902,7 @@
         </p:blipFill>
         <p:spPr>
           <a:xfrm>
-            <a:off x="601675" y="2777947"/>
+            <a:off x="601675" y="4582734"/>
             <a:ext cx="213969" cy="213969"/>
           </a:xfrm>
           <a:prstGeom prst="rect">
@@ -38677,14 +38912,14 @@
       </p:pic>
       <p:sp>
         <p:nvSpPr>
-          <p:cNvPr id="18" name="TextBox 17"/>
+          <p:cNvPr id="31" name="TextBox 30"/>
           <p:cNvSpPr txBox="1"/>
           <p:nvPr/>
         </p:nvSpPr>
         <p:spPr>
           <a:xfrm>
-            <a:off x="1097280" y="2651760"/>
-            <a:ext cx="4572000" cy="457200"/>
+            <a:off x="1097280" y="4515870"/>
+            <a:ext cx="4572000" cy="338554"/>
           </a:xfrm>
           <a:prstGeom prst="rect">
             <a:avLst/>
@@ -38699,283 +38934,25 @@
           <a:p>
             <a:pPr algn="l"/>
             <a:r>
-              <a:rPr sz="2200" b="0" i="0">
+              <a:rPr sz="2200" b="0" i="0" dirty="0">
                 <a:solidFill>
                   <a:srgbClr val="595959"/>
                 </a:solidFill>
               </a:rPr>
-              <a:t>Break</a:t>
-            </a:r>
-          </a:p>
-        </p:txBody>
-      </p:sp>
-      <p:sp>
-        <p:nvSpPr>
-          <p:cNvPr id="20" name="Oval 19"/>
+              <a:t>Outlook: VS Code</a:t>
+            </a:r>
+          </a:p>
+        </p:txBody>
+      </p:sp>
+      <p:sp>
+        <p:nvSpPr>
+          <p:cNvPr id="33" name="Oval 32"/>
           <p:cNvSpPr/>
           <p:nvPr/>
         </p:nvSpPr>
         <p:spPr>
           <a:xfrm>
-            <a:off x="502920" y="3191256"/>
-            <a:ext cx="411480" cy="411480"/>
-          </a:xfrm>
-          <a:prstGeom prst="ellipse">
-            <a:avLst/>
-          </a:prstGeom>
-          <a:solidFill>
-            <a:srgbClr val="FF0000"/>
-          </a:solidFill>
-          <a:ln>
-            <a:noFill/>
-          </a:ln>
-          <a:effectLst/>
-        </p:spPr>
-        <p:style>
-          <a:lnRef idx="1">
-            <a:schemeClr val="accent1"/>
-          </a:lnRef>
-          <a:fillRef idx="3">
-            <a:schemeClr val="accent1"/>
-          </a:fillRef>
-          <a:effectRef idx="2">
-            <a:schemeClr val="accent1"/>
-          </a:effectRef>
-          <a:fontRef idx="minor">
-            <a:schemeClr val="lt1"/>
-          </a:fontRef>
-        </p:style>
-        <p:txBody>
-          <a:bodyPr wrap="square" lIns="0" tIns="0" rIns="0" bIns="0" rtlCol="0" anchor="ctr"/>
-          <a:lstStyle/>
-          <a:p>
-            <a:pPr algn="ctr"/>
-            <a:r>
-              <a:rPr sz="1800" b="1" i="0">
-                <a:solidFill>
-                  <a:srgbClr val="FFFFFF"/>
-                </a:solidFill>
-              </a:rPr>
-              <a:t>3</a:t>
-            </a:r>
-          </a:p>
-        </p:txBody>
-      </p:sp>
-      <p:sp>
-        <p:nvSpPr>
-          <p:cNvPr id="21" name="TextBox 20"/>
-          <p:cNvSpPr txBox="1"/>
-          <p:nvPr/>
-        </p:nvSpPr>
-        <p:spPr>
-          <a:xfrm>
-            <a:off x="1097280" y="3163824"/>
-            <a:ext cx="4572000" cy="457200"/>
-          </a:xfrm>
-          <a:prstGeom prst="rect">
-            <a:avLst/>
-          </a:prstGeom>
-          <a:noFill/>
-        </p:spPr>
-        <p:txBody>
-          <a:bodyPr wrap="square" lIns="0" tIns="0" rIns="0" bIns="0" anchor="ctr">
-            <a:spAutoFit/>
-          </a:bodyPr>
-          <a:lstStyle/>
-          <a:p>
-            <a:pPr algn="l"/>
-            <a:r>
-              <a:rPr sz="2200" b="1" i="0">
-                <a:solidFill>
-                  <a:srgbClr val="000000"/>
-                </a:solidFill>
-              </a:rPr>
-              <a:t>uv, the package manager</a:t>
-            </a:r>
-          </a:p>
-        </p:txBody>
-      </p:sp>
-      <p:sp>
-        <p:nvSpPr>
-          <p:cNvPr id="23" name="Oval 22"/>
-          <p:cNvSpPr/>
-          <p:nvPr/>
-        </p:nvSpPr>
-        <p:spPr>
-          <a:xfrm>
-            <a:off x="502920" y="3703320"/>
-            <a:ext cx="411480" cy="411480"/>
-          </a:xfrm>
-          <a:prstGeom prst="ellipse">
-            <a:avLst/>
-          </a:prstGeom>
-          <a:solidFill>
-            <a:srgbClr val="FF0000"/>
-          </a:solidFill>
-          <a:ln>
-            <a:noFill/>
-          </a:ln>
-          <a:effectLst/>
-        </p:spPr>
-        <p:style>
-          <a:lnRef idx="1">
-            <a:schemeClr val="accent1"/>
-          </a:lnRef>
-          <a:fillRef idx="3">
-            <a:schemeClr val="accent1"/>
-          </a:fillRef>
-          <a:effectRef idx="2">
-            <a:schemeClr val="accent1"/>
-          </a:effectRef>
-          <a:fontRef idx="minor">
-            <a:schemeClr val="lt1"/>
-          </a:fontRef>
-        </p:style>
-        <p:txBody>
-          <a:bodyPr wrap="square" lIns="0" tIns="0" rIns="0" bIns="0" rtlCol="0" anchor="ctr"/>
-          <a:lstStyle/>
-          <a:p>
-            <a:pPr algn="ctr"/>
-            <a:r>
-              <a:rPr sz="1800" b="1" i="0">
-                <a:solidFill>
-                  <a:srgbClr val="FFFFFF"/>
-                </a:solidFill>
-              </a:rPr>
-              <a:t>4</a:t>
-            </a:r>
-          </a:p>
-        </p:txBody>
-      </p:sp>
-      <p:sp>
-        <p:nvSpPr>
-          <p:cNvPr id="24" name="TextBox 23"/>
-          <p:cNvSpPr txBox="1"/>
-          <p:nvPr/>
-        </p:nvSpPr>
-        <p:spPr>
-          <a:xfrm>
-            <a:off x="1097280" y="3675888"/>
-            <a:ext cx="4572000" cy="457200"/>
-          </a:xfrm>
-          <a:prstGeom prst="rect">
-            <a:avLst/>
-          </a:prstGeom>
-          <a:noFill/>
-        </p:spPr>
-        <p:txBody>
-          <a:bodyPr wrap="square" lIns="0" tIns="0" rIns="0" bIns="0" anchor="ctr">
-            <a:spAutoFit/>
-          </a:bodyPr>
-          <a:lstStyle/>
-          <a:p>
-            <a:pPr algn="l"/>
-            <a:r>
-              <a:rPr sz="2200" b="1" i="0">
-                <a:solidFill>
-                  <a:srgbClr val="000000"/>
-                </a:solidFill>
-              </a:rPr>
-              <a:t>JupyterLab, your notebook</a:t>
-            </a:r>
-          </a:p>
-        </p:txBody>
-      </p:sp>
-      <p:sp>
-        <p:nvSpPr>
-          <p:cNvPr id="26" name="Oval 25"/>
-          <p:cNvSpPr/>
-          <p:nvPr/>
-        </p:nvSpPr>
-        <p:spPr>
-          <a:xfrm>
-            <a:off x="502920" y="4215384"/>
-            <a:ext cx="411480" cy="411480"/>
-          </a:xfrm>
-          <a:prstGeom prst="ellipse">
-            <a:avLst/>
-          </a:prstGeom>
-          <a:solidFill>
-            <a:srgbClr val="FF0000"/>
-          </a:solidFill>
-          <a:ln>
-            <a:noFill/>
-          </a:ln>
-          <a:effectLst/>
-        </p:spPr>
-        <p:style>
-          <a:lnRef idx="1">
-            <a:schemeClr val="accent1"/>
-          </a:lnRef>
-          <a:fillRef idx="3">
-            <a:schemeClr val="accent1"/>
-          </a:fillRef>
-          <a:effectRef idx="2">
-            <a:schemeClr val="accent1"/>
-          </a:effectRef>
-          <a:fontRef idx="minor">
-            <a:schemeClr val="lt1"/>
-          </a:fontRef>
-        </p:style>
-        <p:txBody>
-          <a:bodyPr wrap="square" lIns="0" tIns="0" rIns="0" bIns="0" rtlCol="0" anchor="ctr"/>
-          <a:lstStyle/>
-          <a:p>
-            <a:pPr algn="ctr"/>
-            <a:r>
-              <a:rPr sz="1800" b="1" i="0">
-                <a:solidFill>
-                  <a:srgbClr val="FFFFFF"/>
-                </a:solidFill>
-              </a:rPr>
-              <a:t>5</a:t>
-            </a:r>
-          </a:p>
-        </p:txBody>
-      </p:sp>
-      <p:sp>
-        <p:nvSpPr>
-          <p:cNvPr id="27" name="TextBox 26"/>
-          <p:cNvSpPr txBox="1"/>
-          <p:nvPr/>
-        </p:nvSpPr>
-        <p:spPr>
-          <a:xfrm>
-            <a:off x="1097280" y="4187952"/>
-            <a:ext cx="4572000" cy="457200"/>
-          </a:xfrm>
-          <a:prstGeom prst="rect">
-            <a:avLst/>
-          </a:prstGeom>
-          <a:noFill/>
-        </p:spPr>
-        <p:txBody>
-          <a:bodyPr wrap="square" lIns="0" tIns="0" rIns="0" bIns="0" anchor="ctr">
-            <a:spAutoFit/>
-          </a:bodyPr>
-          <a:lstStyle/>
-          <a:p>
-            <a:pPr algn="l"/>
-            <a:r>
-              <a:rPr sz="2200" b="1" i="0">
-                <a:solidFill>
-                  <a:srgbClr val="000000"/>
-                </a:solidFill>
-              </a:rPr>
-              <a:t>Live demo: set it all up</a:t>
-            </a:r>
-          </a:p>
-        </p:txBody>
-      </p:sp>
-      <p:sp>
-        <p:nvSpPr>
-          <p:cNvPr id="29" name="Oval 28"/>
-          <p:cNvSpPr/>
-          <p:nvPr/>
-        </p:nvSpPr>
-        <p:spPr>
-          <a:xfrm>
-            <a:off x="502920" y="4727448"/>
+            <a:off x="502920" y="4996043"/>
             <a:ext cx="411480" cy="411480"/>
           </a:xfrm>
           <a:prstGeom prst="ellipse">
@@ -39014,7 +38991,7 @@
       </p:sp>
       <p:pic>
         <p:nvPicPr>
-          <p:cNvPr id="30" name="Picture 29" descr="FaLaptop_FFFFFF.png"/>
+          <p:cNvPr id="34" name="Picture 33" descr="FaFlagCheckered_FFFFFF.png"/>
           <p:cNvPicPr>
             <a:picLocks noChangeAspect="1"/>
           </p:cNvPicPr>
@@ -39028,7 +39005,7 @@
         </p:blipFill>
         <p:spPr>
           <a:xfrm>
-            <a:off x="601675" y="4826203"/>
+            <a:off x="601675" y="5094798"/>
             <a:ext cx="213969" cy="213969"/>
           </a:xfrm>
           <a:prstGeom prst="rect">
@@ -39038,14 +39015,14 @@
       </p:pic>
       <p:sp>
         <p:nvSpPr>
-          <p:cNvPr id="31" name="TextBox 30"/>
+          <p:cNvPr id="35" name="TextBox 34"/>
           <p:cNvSpPr txBox="1"/>
           <p:nvPr/>
         </p:nvSpPr>
         <p:spPr>
           <a:xfrm>
-            <a:off x="1097280" y="4759339"/>
-            <a:ext cx="4572000" cy="338554"/>
+            <a:off x="1097280" y="4968611"/>
+            <a:ext cx="4572000" cy="457200"/>
           </a:xfrm>
           <a:prstGeom prst="rect">
             <a:avLst/>
@@ -39060,32 +39037,34 @@
           <a:p>
             <a:pPr algn="l"/>
             <a:r>
-              <a:rPr sz="2200" b="0" i="0" dirty="0">
+              <a:rPr sz="2200" b="0" i="0">
                 <a:solidFill>
                   <a:srgbClr val="595959"/>
                 </a:solidFill>
               </a:rPr>
-              <a:t>Outlook: VS Code</a:t>
-            </a:r>
-          </a:p>
-        </p:txBody>
-      </p:sp>
-      <p:sp>
-        <p:nvSpPr>
-          <p:cNvPr id="33" name="Oval 32"/>
+              <a:t>Wrap-up &amp; questions</a:t>
+            </a:r>
+          </a:p>
+        </p:txBody>
+      </p:sp>
+      <p:sp>
+        <p:nvSpPr>
+          <p:cNvPr id="37" name="Rounded Rectangle 36"/>
           <p:cNvSpPr/>
           <p:nvPr/>
         </p:nvSpPr>
         <p:spPr>
           <a:xfrm>
-            <a:off x="502920" y="5239512"/>
-            <a:ext cx="411480" cy="411480"/>
-          </a:xfrm>
-          <a:prstGeom prst="ellipse">
-            <a:avLst/>
+            <a:off x="6751320" y="1282161"/>
+            <a:ext cx="4343400" cy="4480560"/>
+          </a:xfrm>
+          <a:prstGeom prst="roundRect">
+            <a:avLst>
+              <a:gd name="adj" fmla="val 3157"/>
+            </a:avLst>
           </a:prstGeom>
           <a:solidFill>
-            <a:srgbClr val="7F7F7F"/>
+            <a:srgbClr val="F2F2F2"/>
           </a:solidFill>
           <a:ln>
             <a:noFill/>
@@ -39115,9 +39094,43 @@
           </a:p>
         </p:txBody>
       </p:sp>
+      <p:sp>
+        <p:nvSpPr>
+          <p:cNvPr id="38" name="TextBox 37"/>
+          <p:cNvSpPr txBox="1"/>
+          <p:nvPr/>
+        </p:nvSpPr>
+        <p:spPr>
+          <a:xfrm>
+            <a:off x="7071359" y="1712151"/>
+            <a:ext cx="3749039" cy="731520"/>
+          </a:xfrm>
+          <a:prstGeom prst="rect">
+            <a:avLst/>
+          </a:prstGeom>
+          <a:noFill/>
+        </p:spPr>
+        <p:txBody>
+          <a:bodyPr wrap="square" lIns="0" tIns="0" rIns="0" bIns="0" anchor="t">
+            <a:spAutoFit/>
+          </a:bodyPr>
+          <a:lstStyle/>
+          <a:p>
+            <a:pPr algn="l"/>
+            <a:r>
+              <a:rPr sz="2000" b="1" i="0" dirty="0">
+                <a:solidFill>
+                  <a:srgbClr val="000000"/>
+                </a:solidFill>
+              </a:rPr>
+              <a:t>By the end of today you will have…</a:t>
+            </a:r>
+          </a:p>
+        </p:txBody>
+      </p:sp>
       <p:pic>
         <p:nvPicPr>
-          <p:cNvPr id="34" name="Picture 33" descr="FaFlagCheckered_FFFFFF.png"/>
+          <p:cNvPr id="39" name="Picture 38" descr="FaCheck_FF0000.png"/>
           <p:cNvPicPr>
             <a:picLocks noChangeAspect="1"/>
           </p:cNvPicPr>
@@ -39131,145 +39144,6 @@
         </p:blipFill>
         <p:spPr>
           <a:xfrm>
-            <a:off x="601675" y="5338267"/>
-            <a:ext cx="213969" cy="213969"/>
-          </a:xfrm>
-          <a:prstGeom prst="rect">
-            <a:avLst/>
-          </a:prstGeom>
-        </p:spPr>
-      </p:pic>
-      <p:sp>
-        <p:nvSpPr>
-          <p:cNvPr id="35" name="TextBox 34"/>
-          <p:cNvSpPr txBox="1"/>
-          <p:nvPr/>
-        </p:nvSpPr>
-        <p:spPr>
-          <a:xfrm>
-            <a:off x="1097280" y="5212080"/>
-            <a:ext cx="4572000" cy="457200"/>
-          </a:xfrm>
-          <a:prstGeom prst="rect">
-            <a:avLst/>
-          </a:prstGeom>
-          <a:noFill/>
-        </p:spPr>
-        <p:txBody>
-          <a:bodyPr wrap="square" lIns="0" tIns="0" rIns="0" bIns="0" anchor="ctr">
-            <a:spAutoFit/>
-          </a:bodyPr>
-          <a:lstStyle/>
-          <a:p>
-            <a:pPr algn="l"/>
-            <a:r>
-              <a:rPr sz="2200" b="0" i="0">
-                <a:solidFill>
-                  <a:srgbClr val="595959"/>
-                </a:solidFill>
-              </a:rPr>
-              <a:t>Wrap-up &amp; questions</a:t>
-            </a:r>
-          </a:p>
-        </p:txBody>
-      </p:sp>
-      <p:sp>
-        <p:nvSpPr>
-          <p:cNvPr id="37" name="Rounded Rectangle 36"/>
-          <p:cNvSpPr/>
-          <p:nvPr/>
-        </p:nvSpPr>
-        <p:spPr>
-          <a:xfrm>
-            <a:off x="6751320" y="1282161"/>
-            <a:ext cx="4343400" cy="4480560"/>
-          </a:xfrm>
-          <a:prstGeom prst="roundRect">
-            <a:avLst>
-              <a:gd name="adj" fmla="val 3157"/>
-            </a:avLst>
-          </a:prstGeom>
-          <a:solidFill>
-            <a:srgbClr val="F2F2F2"/>
-          </a:solidFill>
-          <a:ln>
-            <a:noFill/>
-          </a:ln>
-          <a:effectLst/>
-        </p:spPr>
-        <p:style>
-          <a:lnRef idx="1">
-            <a:schemeClr val="accent1"/>
-          </a:lnRef>
-          <a:fillRef idx="3">
-            <a:schemeClr val="accent1"/>
-          </a:fillRef>
-          <a:effectRef idx="2">
-            <a:schemeClr val="accent1"/>
-          </a:effectRef>
-          <a:fontRef idx="minor">
-            <a:schemeClr val="lt1"/>
-          </a:fontRef>
-        </p:style>
-        <p:txBody>
-          <a:bodyPr rtlCol="0" anchor="ctr"/>
-          <a:lstStyle/>
-          <a:p>
-            <a:pPr algn="ctr"/>
-            <a:endParaRPr/>
-          </a:p>
-        </p:txBody>
-      </p:sp>
-      <p:sp>
-        <p:nvSpPr>
-          <p:cNvPr id="38" name="TextBox 37"/>
-          <p:cNvSpPr txBox="1"/>
-          <p:nvPr/>
-        </p:nvSpPr>
-        <p:spPr>
-          <a:xfrm>
-            <a:off x="7071359" y="1712151"/>
-            <a:ext cx="3749039" cy="731520"/>
-          </a:xfrm>
-          <a:prstGeom prst="rect">
-            <a:avLst/>
-          </a:prstGeom>
-          <a:noFill/>
-        </p:spPr>
-        <p:txBody>
-          <a:bodyPr wrap="square" lIns="0" tIns="0" rIns="0" bIns="0" anchor="t">
-            <a:spAutoFit/>
-          </a:bodyPr>
-          <a:lstStyle/>
-          <a:p>
-            <a:pPr algn="l"/>
-            <a:r>
-              <a:rPr sz="2000" b="1" i="0" dirty="0">
-                <a:solidFill>
-                  <a:srgbClr val="000000"/>
-                </a:solidFill>
-              </a:rPr>
-              <a:t>By the end of today you will have…</a:t>
-            </a:r>
-          </a:p>
-        </p:txBody>
-      </p:sp>
-      <p:pic>
-        <p:nvPicPr>
-          <p:cNvPr id="39" name="Picture 38" descr="FaCheck_FF0000.png"/>
-          <p:cNvPicPr>
-            <a:picLocks noChangeAspect="1"/>
-          </p:cNvPicPr>
-          <p:nvPr/>
-        </p:nvPicPr>
-        <p:blipFill>
-          <a:blip r:embed="rId8"/>
-          <a:stretch>
-            <a:fillRect/>
-          </a:stretch>
-        </p:blipFill>
-        <p:spPr>
-          <a:xfrm>
             <a:off x="7071359" y="2461737"/>
             <a:ext cx="347472" cy="347472"/>
           </a:xfrm>
@@ -39321,7 +39195,7 @@
           <p:nvPr/>
         </p:nvPicPr>
         <p:blipFill>
-          <a:blip r:embed="rId8"/>
+          <a:blip r:embed="rId7"/>
           <a:stretch>
             <a:fillRect/>
           </a:stretch>
@@ -39379,7 +39253,7 @@
           <p:nvPr/>
         </p:nvPicPr>
         <p:blipFill>
-          <a:blip r:embed="rId8"/>
+          <a:blip r:embed="rId7"/>
           <a:stretch>
             <a:fillRect/>
           </a:stretch>
@@ -39437,7 +39311,7 @@
           <p:nvPr/>
         </p:nvPicPr>
         <p:blipFill>
-          <a:blip r:embed="rId8"/>
+          <a:blip r:embed="rId7"/>
           <a:stretch>
             <a:fillRect/>
           </a:stretch>
